--- a/DevOps/Lesson 03 - Git Working With Others/Working With Others.pptx
+++ b/DevOps/Lesson 03 - Git Working With Others/Working With Others.pptx
@@ -18,8 +18,8 @@
     <p:sldId id="267" r:id="rId9"/>
     <p:sldId id="261" r:id="rId10"/>
     <p:sldId id="262" r:id="rId11"/>
-    <p:sldId id="265" r:id="rId12"/>
-    <p:sldId id="264" r:id="rId13"/>
+    <p:sldId id="264" r:id="rId12"/>
+    <p:sldId id="268" r:id="rId13"/>
   </p:sldIdLst>
   <p:sldSz cx="12192000" cy="6858000"/>
   <p:notesSz cx="6858000" cy="9144000"/>
@@ -208,7 +208,7 @@
           <a:p>
             <a:fld id="{0DE57C80-E4BD-48BA-BAB0-AA750253D0EF}" type="datetimeFigureOut">
               <a:rPr lang="en-US" smtClean="0"/>
-              <a:t>28-May-26</a:t>
+              <a:t>7/8/2026</a:t>
             </a:fld>
             <a:endParaRPr lang="en-US"/>
           </a:p>
@@ -636,7 +636,7 @@
           <a:p>
             <a:fld id="{7A3E0868-4E26-4CDC-8A56-D70E2D8B12FE}" type="datetime3">
               <a:rPr lang="en-US" smtClean="0"/>
-              <a:t>28 May 2026</a:t>
+              <a:t>8 July 2026</a:t>
             </a:fld>
             <a:endParaRPr lang="en-US"/>
           </a:p>
@@ -3197,7 +3197,7 @@
           <a:p>
             <a:fld id="{A7B8021B-6105-4216-96FC-94348F216D0E}" type="datetime3">
               <a:rPr lang="en-US" smtClean="0"/>
-              <a:t>28 May 2026</a:t>
+              <a:t>8 July 2026</a:t>
             </a:fld>
             <a:endParaRPr lang="en-US"/>
           </a:p>
@@ -4894,7 +4894,7 @@
           <a:p>
             <a:fld id="{5D27CFAB-73E6-44A8-B862-B3306344E3F2}" type="datetime3">
               <a:rPr lang="en-US" smtClean="0"/>
-              <a:t>28 May 2026</a:t>
+              <a:t>8 July 2026</a:t>
             </a:fld>
             <a:endParaRPr lang="en-US"/>
           </a:p>
@@ -6684,7 +6684,7 @@
           <a:p>
             <a:fld id="{A9B2E784-A5F5-4301-881B-94AC8DBF9DED}" type="datetime3">
               <a:rPr lang="en-US" smtClean="0"/>
-              <a:t>28 May 2026</a:t>
+              <a:t>8 July 2026</a:t>
             </a:fld>
             <a:endParaRPr lang="en-US"/>
           </a:p>
@@ -6863,7 +6863,7 @@
           <a:p>
             <a:fld id="{18EAB3A5-9E92-4BB9-8F22-9632B4FBEDBA}" type="datetime3">
               <a:rPr lang="en-US" smtClean="0"/>
-              <a:t>28 May 2026</a:t>
+              <a:t>8 July 2026</a:t>
             </a:fld>
             <a:endParaRPr lang="en-US"/>
           </a:p>
@@ -7090,7 +7090,7 @@
           <a:p>
             <a:fld id="{40923810-5FB2-48C9-96CA-1DE2C4773142}" type="datetime3">
               <a:rPr lang="en-US" smtClean="0"/>
-              <a:t>28 May 2026</a:t>
+              <a:t>8 July 2026</a:t>
             </a:fld>
             <a:endParaRPr lang="en-US"/>
           </a:p>
@@ -7380,7 +7380,7 @@
           <a:p>
             <a:fld id="{E50EFF4B-86EB-42FB-93EA-7D8F9CB2466F}" type="datetime3">
               <a:rPr lang="en-US" smtClean="0"/>
-              <a:t>28 May 2026</a:t>
+              <a:t>8 July 2026</a:t>
             </a:fld>
             <a:endParaRPr lang="en-US"/>
           </a:p>
@@ -7992,7 +7992,7 @@
           <a:p>
             <a:fld id="{FB14FC24-E041-45E9-9A72-E5755A86890F}" type="datetime3">
               <a:rPr lang="en-US" smtClean="0"/>
-              <a:t>28 May 2026</a:t>
+              <a:t>8 July 2026</a:t>
             </a:fld>
             <a:endParaRPr lang="en-US"/>
           </a:p>
@@ -8852,7 +8852,7 @@
           <a:p>
             <a:fld id="{98A19125-94A7-4474-858C-FD9C4ABE9DDA}" type="datetime3">
               <a:rPr lang="en-US" smtClean="0"/>
-              <a:t>28 May 2026</a:t>
+              <a:t>8 July 2026</a:t>
             </a:fld>
             <a:endParaRPr lang="en-US"/>
           </a:p>
@@ -9955,7 +9955,7 @@
           <a:p>
             <a:fld id="{3BA0343D-C8D8-43CE-BB79-50DEA219DB07}" type="datetime3">
               <a:rPr lang="en-US" smtClean="0"/>
-              <a:t>28 May 2026</a:t>
+              <a:t>8 July 2026</a:t>
             </a:fld>
             <a:endParaRPr lang="en-US"/>
           </a:p>
@@ -10244,7 +10244,7 @@
           <a:p>
             <a:fld id="{453BD212-0B9F-4987-965F-AC83B2FC354F}" type="datetime3">
               <a:rPr lang="en-US" smtClean="0"/>
-              <a:t>28 May 2026</a:t>
+              <a:t>8 July 2026</a:t>
             </a:fld>
             <a:endParaRPr lang="en-US"/>
           </a:p>
@@ -10489,7 +10489,7 @@
           <a:p>
             <a:fld id="{6DDC931E-8CBE-4A3F-A034-9B6122C6DCDB}" type="datetime3">
               <a:rPr lang="en-US" smtClean="0"/>
-              <a:t>28 May 2026</a:t>
+              <a:t>8 July 2026</a:t>
             </a:fld>
             <a:endParaRPr lang="en-US"/>
           </a:p>
@@ -12255,7 +12255,7 @@
           <a:p>
             <a:fld id="{220AF9C2-5E8A-4308-AE6B-CA9B65007D0E}" type="datetime3">
               <a:rPr lang="en-US" smtClean="0"/>
-              <a:t>28 May 2026</a:t>
+              <a:t>8 July 2026</a:t>
             </a:fld>
             <a:endParaRPr lang="en-US"/>
           </a:p>
@@ -12568,7 +12568,7 @@
           <a:p>
             <a:fld id="{FF31E861-D2AF-431D-860B-DCF67C218052}" type="datetime3">
               <a:rPr lang="en-US" smtClean="0"/>
-              <a:t>28 May 2026</a:t>
+              <a:t>8 July 2026</a:t>
             </a:fld>
             <a:endParaRPr lang="en-US"/>
           </a:p>
@@ -12847,7 +12847,7 @@
           <a:p>
             <a:fld id="{D1DA25B2-AAF1-4C1F-AA38-12D5BFA7D4C8}" type="datetime3">
               <a:rPr lang="en-US" smtClean="0"/>
-              <a:t>28 May 2026</a:t>
+              <a:t>8 July 2026</a:t>
             </a:fld>
             <a:endParaRPr lang="en-US"/>
           </a:p>
@@ -13126,7 +13126,7 @@
           <a:p>
             <a:fld id="{A25C0F39-45D0-48E9-90B3-7FE8FCE561C8}" type="datetime3">
               <a:rPr lang="en-US" smtClean="0"/>
-              <a:t>28 May 2026</a:t>
+              <a:t>8 July 2026</a:t>
             </a:fld>
             <a:endParaRPr lang="en-US"/>
           </a:p>
@@ -13627,7 +13627,7 @@
           <a:p>
             <a:fld id="{9BAF1A3D-92FA-4F24-9781-74AFA516A230}" type="datetime3">
               <a:rPr lang="en-US" smtClean="0"/>
-              <a:t>28 May 2026</a:t>
+              <a:t>8 July 2026</a:t>
             </a:fld>
             <a:endParaRPr lang="en-US"/>
           </a:p>
@@ -13754,7 +13754,7 @@
           <a:p>
             <a:fld id="{5719C672-856D-4617-A693-8FE15749A9B7}" type="datetime3">
               <a:rPr lang="en-US" smtClean="0"/>
-              <a:t>28 May 2026</a:t>
+              <a:t>8 July 2026</a:t>
             </a:fld>
             <a:endParaRPr lang="en-US"/>
           </a:p>
@@ -13889,7 +13889,7 @@
           <a:p>
             <a:fld id="{5F6C764D-A39E-4C03-B161-E0BC66E8883B}" type="datetime3">
               <a:rPr lang="en-US" smtClean="0"/>
-              <a:t>28 May 2026</a:t>
+              <a:t>8 July 2026</a:t>
             </a:fld>
             <a:endParaRPr lang="en-US"/>
           </a:p>
@@ -14131,7 +14131,7 @@
           <a:p>
             <a:fld id="{6E3E33F9-20B7-4995-BE7D-165DBB597850}" type="datetime3">
               <a:rPr lang="en-US" smtClean="0"/>
-              <a:t>28 May 2026</a:t>
+              <a:t>8 July 2026</a:t>
             </a:fld>
             <a:endParaRPr lang="en-US"/>
           </a:p>
@@ -14244,7 +14244,7 @@
           <a:p>
             <a:fld id="{CD41C263-3501-4369-A962-62B6BF915CDE}" type="datetime3">
               <a:rPr lang="en-US" smtClean="0"/>
-              <a:t>28 May 2026</a:t>
+              <a:t>8 July 2026</a:t>
             </a:fld>
             <a:endParaRPr lang="en-US"/>
           </a:p>
@@ -14647,7 +14647,7 @@
           <a:p>
             <a:fld id="{B06F3EBE-B2E8-4992-9F00-9E4B44F057C0}" type="datetime3">
               <a:rPr lang="en-US" smtClean="0"/>
-              <a:t>28 May 2026</a:t>
+              <a:t>8 July 2026</a:t>
             </a:fld>
             <a:endParaRPr lang="en-US"/>
           </a:p>
@@ -14779,7 +14779,7 @@
           <a:p>
             <a:fld id="{D41656AB-D2E1-472E-8B95-0DF5C6E1D623}" type="datetime3">
               <a:rPr lang="en-US" smtClean="0"/>
-              <a:t>28 May 2026</a:t>
+              <a:t>8 July 2026</a:t>
             </a:fld>
             <a:endParaRPr lang="en-US"/>
           </a:p>
@@ -18965,7 +18965,7 @@
           <a:p>
             <a:fld id="{F53CE5D9-8CB3-4D3A-B563-A2D3F8C45F11}" type="datetimeFigureOut">
               <a:rPr lang="en-US" smtClean="0"/>
-              <a:t>28-May-26</a:t>
+              <a:t>7/8/2026</a:t>
             </a:fld>
             <a:endParaRPr lang="en-US"/>
           </a:p>
@@ -19161,7 +19161,7 @@
           <a:p>
             <a:fld id="{AD622D1A-DF83-41A8-85FF-04D90BF831D3}" type="datetime3">
               <a:rPr lang="en-US" smtClean="0"/>
-              <a:t>28 May 2026</a:t>
+              <a:t>8 July 2026</a:t>
             </a:fld>
             <a:endParaRPr lang="en-US"/>
           </a:p>
@@ -19411,7 +19411,7 @@
           <a:p>
             <a:fld id="{334F72C3-CDF3-44A8-B602-1649B1728485}" type="datetime3">
               <a:rPr lang="en-US" smtClean="0"/>
-              <a:t>28 May 2026</a:t>
+              <a:t>8 July 2026</a:t>
             </a:fld>
             <a:endParaRPr lang="en-US"/>
           </a:p>
@@ -19718,7 +19718,7 @@
           <a:p>
             <a:fld id="{1E0132BA-B5E7-4FFD-AF6C-169169D47D4A}" type="datetime3">
               <a:rPr lang="en-US" smtClean="0"/>
-              <a:t>28 May 2026</a:t>
+              <a:t>8 July 2026</a:t>
             </a:fld>
             <a:endParaRPr lang="en-US"/>
           </a:p>
@@ -20199,7 +20199,7 @@
           <a:p>
             <a:fld id="{81A30091-1C2A-4151-8D3C-D1E47A72615F}" type="datetime3">
               <a:rPr lang="en-US" smtClean="0"/>
-              <a:t>28 May 2026</a:t>
+              <a:t>8 July 2026</a:t>
             </a:fld>
             <a:endParaRPr lang="en-US"/>
           </a:p>
@@ -20836,7 +20836,7 @@
           <a:p>
             <a:fld id="{35D703CE-07B4-4C05-A488-B4566700621F}" type="datetime3">
               <a:rPr lang="en-US" smtClean="0"/>
-              <a:t>28 May 2026</a:t>
+              <a:t>8 July 2026</a:t>
             </a:fld>
             <a:endParaRPr lang="en-US"/>
           </a:p>
@@ -21894,7 +21894,7 @@
           <a:p>
             <a:fld id="{694BD61C-20BA-43AF-A21F-1DAFB3200099}" type="datetime3">
               <a:rPr lang="en-US" smtClean="0"/>
-              <a:t>28 May 2026</a:t>
+              <a:t>8 July 2026</a:t>
             </a:fld>
             <a:endParaRPr lang="en-US"/>
           </a:p>
@@ -22381,7 +22381,7 @@
           <a:p>
             <a:fld id="{CABCB1B0-B6E5-4DD1-BB55-95C076D6C0C8}" type="datetime3">
               <a:rPr lang="en-US" smtClean="0"/>
-              <a:t>28 May 2026</a:t>
+              <a:t>8 July 2026</a:t>
             </a:fld>
             <a:endParaRPr lang="en-US"/>
           </a:p>
@@ -23498,7 +23498,7 @@
           <p:cNvPr id="2" name="Title 1">
             <a:extLst>
               <a:ext uri="{FF2B5EF4-FFF2-40B4-BE49-F238E27FC236}">
-                <a16:creationId xmlns:a16="http://schemas.microsoft.com/office/drawing/2014/main" id="{34EE4855-6118-428F-2D15-4DFD9174D1A0}"/>
+                <a16:creationId xmlns:a16="http://schemas.microsoft.com/office/drawing/2014/main" id="{A92FB1E2-927F-CFEA-8A2D-37FF6F3C32D5}"/>
               </a:ext>
             </a:extLst>
           </p:cNvPr>
@@ -23514,7 +23514,10 @@
           <a:bodyPr/>
           <a:lstStyle/>
           <a:p>
-            <a:endParaRPr lang="en-US"/>
+            <a:r>
+              <a:rPr lang="en-US" dirty="0"/>
+              <a:t>Hands-On #1</a:t>
+            </a:r>
           </a:p>
         </p:txBody>
       </p:sp>
@@ -23523,15 +23526,15 @@
           <p:cNvPr id="3" name="Content Placeholder 2">
             <a:extLst>
               <a:ext uri="{FF2B5EF4-FFF2-40B4-BE49-F238E27FC236}">
-                <a16:creationId xmlns:a16="http://schemas.microsoft.com/office/drawing/2014/main" id="{22FA329C-4E80-3F07-E06D-BA1AB9A6CFCD}"/>
-              </a:ext>
-            </a:extLst>
-          </p:cNvPr>
-          <p:cNvSpPr>
-            <a:spLocks noGrp="1"/>
-          </p:cNvSpPr>
-          <p:nvPr>
-            <p:ph sz="half" idx="1"/>
+                <a16:creationId xmlns:a16="http://schemas.microsoft.com/office/drawing/2014/main" id="{24E96F23-D37C-FE78-D37E-F3C8667642A1}"/>
+              </a:ext>
+            </a:extLst>
+          </p:cNvPr>
+          <p:cNvSpPr>
+            <a:spLocks noGrp="1"/>
+          </p:cNvSpPr>
+          <p:nvPr>
+            <p:ph idx="1"/>
           </p:nvPr>
         </p:nvSpPr>
         <p:spPr/>
@@ -23539,122 +23542,39 @@
           <a:bodyPr/>
           <a:lstStyle/>
           <a:p>
-            <a:endParaRPr lang="en-US"/>
-          </a:p>
-        </p:txBody>
-      </p:sp>
-      <p:sp>
-        <p:nvSpPr>
-          <p:cNvPr id="4" name="Content Placeholder 3">
-            <a:extLst>
-              <a:ext uri="{FF2B5EF4-FFF2-40B4-BE49-F238E27FC236}">
-                <a16:creationId xmlns:a16="http://schemas.microsoft.com/office/drawing/2014/main" id="{ADA2CB9F-E6E7-632B-F1D9-4D5C05DA3914}"/>
-              </a:ext>
-            </a:extLst>
-          </p:cNvPr>
-          <p:cNvSpPr>
-            <a:spLocks noGrp="1"/>
-          </p:cNvSpPr>
-          <p:nvPr>
-            <p:ph sz="half" idx="2"/>
-          </p:nvPr>
-        </p:nvSpPr>
-        <p:spPr/>
-        <p:txBody>
-          <a:bodyPr/>
-          <a:lstStyle/>
-          <a:p>
-            <a:endParaRPr lang="en-US"/>
-          </a:p>
-        </p:txBody>
-      </p:sp>
-      <p:sp>
-        <p:nvSpPr>
-          <p:cNvPr id="5" name="Date Placeholder 4">
-            <a:extLst>
-              <a:ext uri="{FF2B5EF4-FFF2-40B4-BE49-F238E27FC236}">
-                <a16:creationId xmlns:a16="http://schemas.microsoft.com/office/drawing/2014/main" id="{5E5B4CC1-C002-1302-0FE1-5DC48F1DD376}"/>
-              </a:ext>
-            </a:extLst>
-          </p:cNvPr>
-          <p:cNvSpPr>
-            <a:spLocks noGrp="1"/>
-          </p:cNvSpPr>
-          <p:nvPr>
-            <p:ph type="dt" sz="half" idx="10"/>
-          </p:nvPr>
-        </p:nvSpPr>
-        <p:spPr/>
-        <p:txBody>
-          <a:bodyPr/>
-          <a:lstStyle/>
-          <a:p>
-            <a:fld id="{AF508780-A208-4AE5-B5C7-6D5D06C00AF5}" type="datetime1">
-              <a:rPr lang="en-US" smtClean="0"/>
-              <a:t>28-May-26</a:t>
-            </a:fld>
-            <a:endParaRPr lang="en-US"/>
-          </a:p>
-        </p:txBody>
-      </p:sp>
-      <p:sp>
-        <p:nvSpPr>
-          <p:cNvPr id="6" name="Footer Placeholder 5">
-            <a:extLst>
-              <a:ext uri="{FF2B5EF4-FFF2-40B4-BE49-F238E27FC236}">
-                <a16:creationId xmlns:a16="http://schemas.microsoft.com/office/drawing/2014/main" id="{B3569E6C-70E9-D27D-91BA-3C9585FF9682}"/>
-              </a:ext>
-            </a:extLst>
-          </p:cNvPr>
-          <p:cNvSpPr>
-            <a:spLocks noGrp="1"/>
-          </p:cNvSpPr>
-          <p:nvPr>
-            <p:ph type="ftr" sz="quarter" idx="11"/>
-          </p:nvPr>
-        </p:nvSpPr>
-        <p:spPr/>
-        <p:txBody>
-          <a:bodyPr/>
-          <a:lstStyle/>
-          <a:p>
-            <a:endParaRPr lang="en-US"/>
-          </a:p>
-        </p:txBody>
-      </p:sp>
-      <p:sp>
-        <p:nvSpPr>
-          <p:cNvPr id="7" name="Slide Number Placeholder 6">
-            <a:extLst>
-              <a:ext uri="{FF2B5EF4-FFF2-40B4-BE49-F238E27FC236}">
-                <a16:creationId xmlns:a16="http://schemas.microsoft.com/office/drawing/2014/main" id="{1D8C37AA-BB48-F327-5FD5-B713C7C119D3}"/>
-              </a:ext>
-            </a:extLst>
-          </p:cNvPr>
-          <p:cNvSpPr>
-            <a:spLocks noGrp="1"/>
-          </p:cNvSpPr>
-          <p:nvPr>
-            <p:ph type="sldNum" sz="quarter" idx="12"/>
-          </p:nvPr>
-        </p:nvSpPr>
-        <p:spPr/>
-        <p:txBody>
-          <a:bodyPr/>
-          <a:lstStyle/>
-          <a:p>
-            <a:fld id="{D3B58D9E-3EC9-4D82-B2FE-CB301728EB60}" type="slidenum">
-              <a:rPr lang="en-US" smtClean="0"/>
-              <a:t>11</a:t>
-            </a:fld>
-            <a:endParaRPr lang="en-US"/>
+            <a:r>
+              <a:rPr lang="en-US" dirty="0"/>
+              <a:t>Inspect git remotes</a:t>
+            </a:r>
+          </a:p>
+          <a:p>
+            <a:r>
+              <a:rPr lang="en-US" dirty="0"/>
+              <a:t>Push/pull from a remote repository</a:t>
+            </a:r>
+          </a:p>
+          <a:p>
+            <a:r>
+              <a:rPr lang="en-US" dirty="0"/>
+              <a:t>Fork a remote repository and issue a </a:t>
+            </a:r>
+            <a:r>
+              <a:rPr lang="en-US"/>
+              <a:t>pull request</a:t>
+            </a:r>
+          </a:p>
+          <a:p>
+            <a:endParaRPr lang="en-US" dirty="0"/>
+          </a:p>
+          <a:p>
+            <a:endParaRPr lang="en-US" dirty="0"/>
           </a:p>
         </p:txBody>
       </p:sp>
     </p:spTree>
     <p:extLst>
       <p:ext uri="{BB962C8B-B14F-4D97-AF65-F5344CB8AC3E}">
-        <p14:creationId xmlns:p14="http://schemas.microsoft.com/office/powerpoint/2010/main" val="3290603748"/>
+        <p14:creationId xmlns:p14="http://schemas.microsoft.com/office/powerpoint/2010/main" val="328805936"/>
       </p:ext>
     </p:extLst>
   </p:cSld>
@@ -23686,7 +23606,7 @@
           <p:cNvPr id="2" name="Title 1">
             <a:extLst>
               <a:ext uri="{FF2B5EF4-FFF2-40B4-BE49-F238E27FC236}">
-                <a16:creationId xmlns:a16="http://schemas.microsoft.com/office/drawing/2014/main" id="{A92FB1E2-927F-CFEA-8A2D-37FF6F3C32D5}"/>
+                <a16:creationId xmlns:a16="http://schemas.microsoft.com/office/drawing/2014/main" id="{2F8E7CE5-0010-218B-DFE3-AE99DA7993DE}"/>
               </a:ext>
             </a:extLst>
           </p:cNvPr>
@@ -23703,8 +23623,8 @@
           <a:lstStyle/>
           <a:p>
             <a:r>
-              <a:rPr lang="en-US" dirty="0"/>
-              <a:t>Hands-On #1</a:t>
+              <a:rPr lang="en-US"/>
+              <a:t>Collaboration Exercise</a:t>
             </a:r>
           </a:p>
         </p:txBody>
@@ -23714,7 +23634,7 @@
           <p:cNvPr id="3" name="Content Placeholder 2">
             <a:extLst>
               <a:ext uri="{FF2B5EF4-FFF2-40B4-BE49-F238E27FC236}">
-                <a16:creationId xmlns:a16="http://schemas.microsoft.com/office/drawing/2014/main" id="{24E96F23-D37C-FE78-D37E-F3C8667642A1}"/>
+                <a16:creationId xmlns:a16="http://schemas.microsoft.com/office/drawing/2014/main" id="{1B763D8B-9661-E24B-6351-6CCAC8A94B33}"/>
               </a:ext>
             </a:extLst>
           </p:cNvPr>
@@ -23730,39 +23650,73 @@
           <a:bodyPr/>
           <a:lstStyle/>
           <a:p>
-            <a:r>
-              <a:rPr lang="en-US" dirty="0"/>
-              <a:t>Inspect git remotes</a:t>
-            </a:r>
-          </a:p>
-          <a:p>
-            <a:r>
-              <a:rPr lang="en-US" dirty="0"/>
-              <a:t>Push/pull from a remote repository</a:t>
-            </a:r>
-          </a:p>
-          <a:p>
-            <a:r>
-              <a:rPr lang="en-US" dirty="0"/>
-              <a:t>Fork a remote repository and issue a </a:t>
-            </a:r>
-            <a:r>
-              <a:rPr lang="en-US"/>
-              <a:t>pull request</a:t>
-            </a:r>
-          </a:p>
-          <a:p>
-            <a:endParaRPr lang="en-US" dirty="0"/>
-          </a:p>
-          <a:p>
-            <a:endParaRPr lang="en-US" dirty="0"/>
+            <a:endParaRPr lang="en-US"/>
+          </a:p>
+        </p:txBody>
+      </p:sp>
+      <p:sp>
+        <p:nvSpPr>
+          <p:cNvPr id="4" name="Date Placeholder 3">
+            <a:extLst>
+              <a:ext uri="{FF2B5EF4-FFF2-40B4-BE49-F238E27FC236}">
+                <a16:creationId xmlns:a16="http://schemas.microsoft.com/office/drawing/2014/main" id="{7386B00E-C197-49A4-6DE1-42182197D71D}"/>
+              </a:ext>
+            </a:extLst>
+          </p:cNvPr>
+          <p:cNvSpPr>
+            <a:spLocks noGrp="1"/>
+          </p:cNvSpPr>
+          <p:nvPr>
+            <p:ph type="dt" sz="half" idx="10"/>
+          </p:nvPr>
+        </p:nvSpPr>
+        <p:spPr/>
+        <p:txBody>
+          <a:bodyPr/>
+          <a:lstStyle/>
+          <a:p>
+            <a:fld id="{AD622D1A-DF83-41A8-85FF-04D90BF831D3}" type="datetime3">
+              <a:rPr lang="en-US" smtClean="0"/>
+              <a:t>8 July 2026</a:t>
+            </a:fld>
+            <a:endParaRPr lang="en-US"/>
+          </a:p>
+        </p:txBody>
+      </p:sp>
+      <p:sp>
+        <p:nvSpPr>
+          <p:cNvPr id="5" name="Slide Number Placeholder 4">
+            <a:extLst>
+              <a:ext uri="{FF2B5EF4-FFF2-40B4-BE49-F238E27FC236}">
+                <a16:creationId xmlns:a16="http://schemas.microsoft.com/office/drawing/2014/main" id="{270F6CCF-EE04-F688-EFC1-EE1976F065DE}"/>
+              </a:ext>
+            </a:extLst>
+          </p:cNvPr>
+          <p:cNvSpPr>
+            <a:spLocks noGrp="1"/>
+          </p:cNvSpPr>
+          <p:nvPr>
+            <p:ph type="sldNum" sz="quarter" idx="11"/>
+          </p:nvPr>
+        </p:nvSpPr>
+        <p:spPr/>
+        <p:txBody>
+          <a:bodyPr/>
+          <a:lstStyle/>
+          <a:p>
+            <a:fld id="{64E5BE4B-2FBF-4174-9E62-85FAD1CB43A6}" type="slidenum">
+              <a:rPr lang="en-US" smtClean="0"/>
+              <a:pPr/>
+              <a:t>12</a:t>
+            </a:fld>
+            <a:endParaRPr lang="en-US"/>
           </a:p>
         </p:txBody>
       </p:sp>
     </p:spTree>
     <p:extLst>
       <p:ext uri="{BB962C8B-B14F-4D97-AF65-F5344CB8AC3E}">
-        <p14:creationId xmlns:p14="http://schemas.microsoft.com/office/powerpoint/2010/main" val="328805936"/>
+        <p14:creationId xmlns:p14="http://schemas.microsoft.com/office/powerpoint/2010/main" val="3376107589"/>
       </p:ext>
     </p:extLst>
   </p:cSld>
@@ -24563,7 +24517,7 @@
           <a:p>
             <a:fld id="{AD622D1A-DF83-41A8-85FF-04D90BF831D3}" type="datetime3">
               <a:rPr lang="en-US" smtClean="0"/>
-              <a:t>28 May 2026</a:t>
+              <a:t>8 July 2026</a:t>
             </a:fld>
             <a:endParaRPr lang="en-US"/>
           </a:p>
@@ -24822,7 +24776,7 @@
           <a:p>
             <a:fld id="{AD622D1A-DF83-41A8-85FF-04D90BF831D3}" type="datetime3">
               <a:rPr lang="en-US" smtClean="0"/>
-              <a:t>28 May 2026</a:t>
+              <a:t>8 July 2026</a:t>
             </a:fld>
             <a:endParaRPr lang="en-US"/>
           </a:p>
